--- a/src/main/resources/templates/cv_template_master.pptx
+++ b/src/main/resources/templates/cv_template_master.pptx
@@ -7676,7 +7676,7 @@
 </file>
 
 <file path=ppt/slides/slide1.xml><?xml version="1.0" encoding="utf-8"?>
-<p:sld xmlns:a="http://schemas.openxmlformats.org/drawingml/2006/main" xmlns:ns3="http://schemas.microsoft.com/office/drawing/2016/SVG/main" xmlns:ns4="http://schemas.openxmlformats.org/markup-compatibility/2006" xmlns:ns5="http://schemas.microsoft.com/office/powerpoint/2010/main" xmlns:p="http://schemas.openxmlformats.org/presentationml/2006/main" xmlns:r="http://schemas.openxmlformats.org/officeDocument/2006/relationships">
+<p:sld xmlns:a="http://schemas.openxmlformats.org/drawingml/2006/main" xmlns:ns3="http://schemas.microsoft.com/office/drawing/2016/SVG/main" xmlns:ns4="http://schemas.openxmlformats.org/markup-compatibility/2006" xmlns:ns5="http://schemas.microsoft.com/office/powerpoint/2010/main" xmlns:p="http://schemas.openxmlformats.org/presentationml/2006/main" xmlns:r="http://schemas.openxmlformats.org/officeDocument/2006/relationships" xmlns:p14="http://schemas.microsoft.com/office/powerpoint/2010/main">
   <p:cSld>
     <p:spTree>
       <p:nvGrpSpPr>
